--- a/proyecto_final_rvdl.pptx
+++ b/proyecto_final_rvdl.pptx
@@ -113,6 +113,11 @@
       </a:defRPr>
     </a:lvl9pPr>
   </p:defaultTextStyle>
+  <p:extLst>
+    <p:ext uri="{EFAFB233-063F-42B5-8137-9DF3F51BA10A}">
+      <p15:sldGuideLst xmlns:p15="http://schemas.microsoft.com/office/powerpoint/2012/main"/>
+    </p:ext>
+  </p:extLst>
 </p:presentation>
 </file>
 
@@ -265,7 +270,7 @@
           <a:p>
             <a:fld id="{1090EAD6-900F-4D8A-BA46-CB8AFF023E03}" type="datetimeFigureOut">
               <a:rPr lang="es-CL" smtClean="0"/>
-              <a:t>23-06-2026</a:t>
+              <a:t>24-06-2026</a:t>
             </a:fld>
             <a:endParaRPr lang="es-CL"/>
           </a:p>
@@ -465,7 +470,7 @@
           <a:p>
             <a:fld id="{1090EAD6-900F-4D8A-BA46-CB8AFF023E03}" type="datetimeFigureOut">
               <a:rPr lang="es-CL" smtClean="0"/>
-              <a:t>23-06-2026</a:t>
+              <a:t>24-06-2026</a:t>
             </a:fld>
             <a:endParaRPr lang="es-CL"/>
           </a:p>
@@ -675,7 +680,7 @@
           <a:p>
             <a:fld id="{1090EAD6-900F-4D8A-BA46-CB8AFF023E03}" type="datetimeFigureOut">
               <a:rPr lang="es-CL" smtClean="0"/>
-              <a:t>23-06-2026</a:t>
+              <a:t>24-06-2026</a:t>
             </a:fld>
             <a:endParaRPr lang="es-CL"/>
           </a:p>
@@ -875,7 +880,7 @@
           <a:p>
             <a:fld id="{1090EAD6-900F-4D8A-BA46-CB8AFF023E03}" type="datetimeFigureOut">
               <a:rPr lang="es-CL" smtClean="0"/>
-              <a:t>23-06-2026</a:t>
+              <a:t>24-06-2026</a:t>
             </a:fld>
             <a:endParaRPr lang="es-CL"/>
           </a:p>
@@ -1151,7 +1156,7 @@
           <a:p>
             <a:fld id="{1090EAD6-900F-4D8A-BA46-CB8AFF023E03}" type="datetimeFigureOut">
               <a:rPr lang="es-CL" smtClean="0"/>
-              <a:t>23-06-2026</a:t>
+              <a:t>24-06-2026</a:t>
             </a:fld>
             <a:endParaRPr lang="es-CL"/>
           </a:p>
@@ -1419,7 +1424,7 @@
           <a:p>
             <a:fld id="{1090EAD6-900F-4D8A-BA46-CB8AFF023E03}" type="datetimeFigureOut">
               <a:rPr lang="es-CL" smtClean="0"/>
-              <a:t>23-06-2026</a:t>
+              <a:t>24-06-2026</a:t>
             </a:fld>
             <a:endParaRPr lang="es-CL"/>
           </a:p>
@@ -1834,7 +1839,7 @@
           <a:p>
             <a:fld id="{1090EAD6-900F-4D8A-BA46-CB8AFF023E03}" type="datetimeFigureOut">
               <a:rPr lang="es-CL" smtClean="0"/>
-              <a:t>23-06-2026</a:t>
+              <a:t>24-06-2026</a:t>
             </a:fld>
             <a:endParaRPr lang="es-CL"/>
           </a:p>
@@ -1976,7 +1981,7 @@
           <a:p>
             <a:fld id="{1090EAD6-900F-4D8A-BA46-CB8AFF023E03}" type="datetimeFigureOut">
               <a:rPr lang="es-CL" smtClean="0"/>
-              <a:t>23-06-2026</a:t>
+              <a:t>24-06-2026</a:t>
             </a:fld>
             <a:endParaRPr lang="es-CL"/>
           </a:p>
@@ -2089,7 +2094,7 @@
           <a:p>
             <a:fld id="{1090EAD6-900F-4D8A-BA46-CB8AFF023E03}" type="datetimeFigureOut">
               <a:rPr lang="es-CL" smtClean="0"/>
-              <a:t>23-06-2026</a:t>
+              <a:t>24-06-2026</a:t>
             </a:fld>
             <a:endParaRPr lang="es-CL"/>
           </a:p>
@@ -2402,7 +2407,7 @@
           <a:p>
             <a:fld id="{1090EAD6-900F-4D8A-BA46-CB8AFF023E03}" type="datetimeFigureOut">
               <a:rPr lang="es-CL" smtClean="0"/>
-              <a:t>23-06-2026</a:t>
+              <a:t>24-06-2026</a:t>
             </a:fld>
             <a:endParaRPr lang="es-CL"/>
           </a:p>
@@ -2691,7 +2696,7 @@
           <a:p>
             <a:fld id="{1090EAD6-900F-4D8A-BA46-CB8AFF023E03}" type="datetimeFigureOut">
               <a:rPr lang="es-CL" smtClean="0"/>
-              <a:t>23-06-2026</a:t>
+              <a:t>24-06-2026</a:t>
             </a:fld>
             <a:endParaRPr lang="es-CL"/>
           </a:p>
@@ -2937,7 +2942,7 @@
           <a:p>
             <a:fld id="{1090EAD6-900F-4D8A-BA46-CB8AFF023E03}" type="datetimeFigureOut">
               <a:rPr lang="es-CL" smtClean="0"/>
-              <a:t>23-06-2026</a:t>
+              <a:t>24-06-2026</a:t>
             </a:fld>
             <a:endParaRPr lang="es-CL"/>
           </a:p>
@@ -3663,6 +3668,42 @@
           <a:chExt cx="0" cy="0"/>
         </a:xfrm>
       </p:grpSpPr>
+      <p:pic>
+        <p:nvPicPr>
+          <p:cNvPr id="4" name="Imagen 3">
+            <a:extLst>
+              <a:ext uri="{FF2B5EF4-FFF2-40B4-BE49-F238E27FC236}">
+                <a16:creationId xmlns:a16="http://schemas.microsoft.com/office/drawing/2014/main" id="{9E9559BD-B890-32B7-0F81-8CBE62DDEE26}"/>
+              </a:ext>
+            </a:extLst>
+          </p:cNvPr>
+          <p:cNvPicPr>
+            <a:picLocks noChangeAspect="1"/>
+          </p:cNvPicPr>
+          <p:nvPr/>
+        </p:nvPicPr>
+        <p:blipFill>
+          <a:blip r:embed="rId2">
+            <a:extLst>
+              <a:ext uri="{28A0092B-C50C-407E-A947-70E740481C1C}">
+                <a14:useLocalDpi xmlns:a14="http://schemas.microsoft.com/office/drawing/2010/main" val="0"/>
+              </a:ext>
+            </a:extLst>
+          </a:blip>
+          <a:stretch>
+            <a:fillRect/>
+          </a:stretch>
+        </p:blipFill>
+        <p:spPr>
+          <a:xfrm>
+            <a:off x="10202061" y="0"/>
+            <a:ext cx="1989939" cy="1989939"/>
+          </a:xfrm>
+          <a:prstGeom prst="rect">
+            <a:avLst/>
+          </a:prstGeom>
+        </p:spPr>
+      </p:pic>
       <p:sp>
         <p:nvSpPr>
           <p:cNvPr id="2" name="Título 1">
@@ -6264,8 +6305,8 @@
         </p:blipFill>
         <p:spPr>
           <a:xfrm rot="5400000">
-            <a:off x="96520" y="5715000"/>
-            <a:ext cx="1607185" cy="1607185"/>
+            <a:off x="10287000" y="-165100"/>
+            <a:ext cx="1905000" cy="1905000"/>
           </a:xfrm>
           <a:prstGeom prst="rect">
             <a:avLst/>
@@ -8807,6 +8848,42 @@
           <a:chExt cx="0" cy="0"/>
         </a:xfrm>
       </p:grpSpPr>
+      <p:pic>
+        <p:nvPicPr>
+          <p:cNvPr id="6" name="Imagen 5">
+            <a:extLst>
+              <a:ext uri="{FF2B5EF4-FFF2-40B4-BE49-F238E27FC236}">
+                <a16:creationId xmlns:a16="http://schemas.microsoft.com/office/drawing/2014/main" id="{3552C977-6C08-933C-FE7E-C7F284F08740}"/>
+              </a:ext>
+            </a:extLst>
+          </p:cNvPr>
+          <p:cNvPicPr>
+            <a:picLocks noChangeAspect="1"/>
+          </p:cNvPicPr>
+          <p:nvPr/>
+        </p:nvPicPr>
+        <p:blipFill>
+          <a:blip r:embed="rId2">
+            <a:extLst>
+              <a:ext uri="{28A0092B-C50C-407E-A947-70E740481C1C}">
+                <a14:useLocalDpi xmlns:a14="http://schemas.microsoft.com/office/drawing/2010/main" val="0"/>
+              </a:ext>
+            </a:extLst>
+          </a:blip>
+          <a:stretch>
+            <a:fillRect/>
+          </a:stretch>
+        </p:blipFill>
+        <p:spPr>
+          <a:xfrm>
+            <a:off x="10118757" y="0"/>
+            <a:ext cx="2218099" cy="2218099"/>
+          </a:xfrm>
+          <a:prstGeom prst="rect">
+            <a:avLst/>
+          </a:prstGeom>
+        </p:spPr>
+      </p:pic>
       <p:sp>
         <p:nvSpPr>
           <p:cNvPr id="2" name="Título 1">
@@ -9672,7 +9749,7 @@
           <p:nvPr/>
         </p:nvPicPr>
         <p:blipFill>
-          <a:blip r:embed="rId2">
+          <a:blip r:embed="rId3">
             <a:extLst>
               <a:ext uri="{28A0092B-C50C-407E-A947-70E740481C1C}">
                 <a14:useLocalDpi xmlns:a14="http://schemas.microsoft.com/office/drawing/2010/main" val="0"/>
@@ -9723,6 +9800,42 @@
           <a:chExt cx="0" cy="0"/>
         </a:xfrm>
       </p:grpSpPr>
+      <p:pic>
+        <p:nvPicPr>
+          <p:cNvPr id="4" name="Imagen 3">
+            <a:extLst>
+              <a:ext uri="{FF2B5EF4-FFF2-40B4-BE49-F238E27FC236}">
+                <a16:creationId xmlns:a16="http://schemas.microsoft.com/office/drawing/2014/main" id="{0E8906F5-BEBE-22B3-DA19-F682D2D11F92}"/>
+              </a:ext>
+            </a:extLst>
+          </p:cNvPr>
+          <p:cNvPicPr>
+            <a:picLocks noChangeAspect="1"/>
+          </p:cNvPicPr>
+          <p:nvPr/>
+        </p:nvPicPr>
+        <p:blipFill>
+          <a:blip r:embed="rId2">
+            <a:extLst>
+              <a:ext uri="{28A0092B-C50C-407E-A947-70E740481C1C}">
+                <a14:useLocalDpi xmlns:a14="http://schemas.microsoft.com/office/drawing/2010/main" val="0"/>
+              </a:ext>
+            </a:extLst>
+          </a:blip>
+          <a:stretch>
+            <a:fillRect/>
+          </a:stretch>
+        </p:blipFill>
+        <p:spPr>
+          <a:xfrm>
+            <a:off x="10219758" y="28575"/>
+            <a:ext cx="1972241" cy="1972241"/>
+          </a:xfrm>
+          <a:prstGeom prst="rect">
+            <a:avLst/>
+          </a:prstGeom>
+        </p:spPr>
+      </p:pic>
       <p:sp>
         <p:nvSpPr>
           <p:cNvPr id="2" name="Título 1">
@@ -9745,10 +9858,10 @@
           <a:lstStyle/>
           <a:p>
             <a:r>
-              <a:rPr lang="es-MX"/>
+              <a:rPr lang="es-MX" dirty="0"/>
               <a:t>AP por clase: dónde se concentra la ventaja</a:t>
             </a:r>
-            <a:endParaRPr lang="es-CL"/>
+            <a:endParaRPr lang="es-CL" dirty="0"/>
           </a:p>
         </p:txBody>
       </p:sp>
@@ -10210,7 +10323,7 @@
           <p:nvPr/>
         </p:nvPicPr>
         <p:blipFill>
-          <a:blip r:embed="rId2">
+          <a:blip r:embed="rId3">
             <a:extLst>
               <a:ext uri="{28A0092B-C50C-407E-A947-70E740481C1C}">
                 <a14:useLocalDpi xmlns:a14="http://schemas.microsoft.com/office/drawing/2010/main" val="0"/>
